--- a/05-AI应用基础48课时版/V2授课PPT/W15-第13次课-ResNet迁移学习（上.pptx
+++ b/05-AI应用基础48课时版/V2授课PPT/W15-第13次课-ResNet迁移学习（上.pptx
@@ -6393,7 +6393,7 @@
                 </a:solidFill>
                 <a:latin typeface="微软雅黑"/>
               </a:rPr>
-              <a:t>第20周 · 第13次课（2课时 · 80分钟）</a:t>
+              <a:t>第15周 · 第13次课（2课时 · 80分钟）</a:t>
             </a:r>
           </a:p>
           <a:p>
@@ -58631,7 +58631,7 @@
                 </a:solidFill>
                 <a:latin typeface="微软雅黑"/>
               </a:rPr>
-              <a:t>下次课预告（第16周）</a:t>
+              <a:t>下次课预告（第15周）</a:t>
             </a:r>
           </a:p>
         </p:txBody>
